--- a/06_relazioni_e_parametri/Slides_v2/05_metodo-suzuki-trotter.pptx
+++ b/06_relazioni_e_parametri/Slides_v2/05_metodo-suzuki-trotter.pptx
@@ -1207,6 +1207,7 @@
                 </a:r>
               </a:p>
               <a:p>
+                <a:pPr/>
                 <a:br>
                   <a:rPr lang="en-US" sz="1400" dirty="0"/>
                 </a:br>
@@ -1483,7 +1484,21 @@
                 </a:r>
                 <a:r>
                   <a:rPr lang="en-US" sz="1400" dirty="0"/>
-                  <a:t> t in r </a:t>
+                  <a:t> t in </a:t>
+                </a:r>
+                <a14:m>
+                  <m:oMath xmlns:m="http://schemas.openxmlformats.org/officeDocument/2006/math">
+                    <m:r>
+                      <a:rPr lang="en-US" sz="1400" i="1">
+                        <a:latin typeface="Cambria Math" panose="02040503050406030204" pitchFamily="18" charset="0"/>
+                      </a:rPr>
+                      <m:t>𝑁</m:t>
+                    </m:r>
+                  </m:oMath>
+                </a14:m>
+                <a:r>
+                  <a:rPr lang="en-US" sz="1400" dirty="0"/>
+                  <a:t> </a:t>
                 </a:r>
                 <a:r>
                   <a:rPr lang="en-US" sz="1400" dirty="0" err="1"/>
@@ -1534,10 +1549,10 @@
                       <m:t>/</m:t>
                     </m:r>
                     <m:r>
-                      <a:rPr lang="en-US" sz="1400" i="1" dirty="0">
+                      <a:rPr lang="en-US" sz="1400" i="1">
                         <a:latin typeface="Cambria Math" panose="02040503050406030204" pitchFamily="18" charset="0"/>
                       </a:rPr>
-                      <m:t>𝑟</m:t>
+                      <m:t>𝑁</m:t>
                     </m:r>
                   </m:oMath>
                 </a14:m>
@@ -1604,6 +1619,18 @@
                           <m:t>o</m:t>
                         </m:r>
                         <m:r>
+                          <a:rPr lang="en-US" sz="1400" b="0" i="1" dirty="0" smtClean="0">
+                            <a:latin typeface="Cambria Math" panose="02040503050406030204" pitchFamily="18" charset="0"/>
+                          </a:rPr>
+                          <m:t> </m:t>
+                        </m:r>
+                        <m:r>
+                          <a:rPr lang="en-US" sz="1400" i="1">
+                            <a:latin typeface="Cambria Math" panose="02040503050406030204" pitchFamily="18" charset="0"/>
+                          </a:rPr>
+                          <m:t>𝑁</m:t>
+                        </m:r>
+                        <m:r>
                           <a:rPr lang="en-US" sz="1400" i="0" dirty="0">
                             <a:latin typeface="Cambria Math" panose="02040503050406030204" pitchFamily="18" charset="0"/>
                           </a:rPr>
@@ -1640,6 +1667,7 @@
                 <a:endParaRPr lang="en-US" sz="1400" dirty="0"/>
               </a:p>
               <a:p>
+                <a:pPr/>
                 <a:br>
                   <a:rPr lang="en-US" sz="1400" dirty="0"/>
                 </a:br>
@@ -2189,10 +2217,13 @@
                         <m:t>+</m:t>
                       </m:r>
                       <m:r>
-                        <a:rPr lang="en-US" sz="1400" dirty="0">
+                        <m:rPr>
+                          <m:sty m:val="p"/>
+                        </m:rPr>
+                        <a:rPr lang="en-US" sz="1400" b="0" i="1" dirty="0" smtClean="0">
                           <a:latin typeface="Cambria Math" panose="02040503050406030204" pitchFamily="18" charset="0"/>
                         </a:rPr>
-                        <m:t>𝒪</m:t>
+                        <m:t>O</m:t>
                       </m:r>
                       <m:d>
                         <m:dPr>
@@ -2240,10 +2271,10 @@
                             </m:num>
                             <m:den>
                               <m:r>
-                                <a:rPr lang="en-US" sz="1400" i="1" dirty="0">
+                                <a:rPr lang="en-US" sz="1400" i="1">
                                   <a:latin typeface="Cambria Math" panose="02040503050406030204" pitchFamily="18" charset="0"/>
                                 </a:rPr>
-                                <m:t>𝑟</m:t>
+                                <m:t>𝑁</m:t>
                               </m:r>
                             </m:den>
                           </m:f>
